--- a/public/fun/pack/pptx/newspro/카드뉴스프리미엄_39_감사·칭찬_미드나잇실버.pptx
+++ b/public/fun/pack/pptx/newspro/카드뉴스프리미엄_39_감사·칭찬_미드나잇실버.pptx
@@ -113,12 +113,12 @@
   <p:extLst>
     <p:ext uri="{521415D9-36F7-43E2-AB2F-B90AF26B5E84}">
       <p14:sectionLst xmlns:p14="http://schemas.microsoft.com/office/powerpoint/2010/main">
-        <p14:section name="시작" id="{3FBC1A6D-5FD2-40E5-8CF0-87DDA01340AB}">
+        <p14:section name="시작" id="{0A75DD09-B239-4812-92FE-B8747F4647BE}">
           <p14:sldIdLst>
             <p14:sldId id="256"/>
           </p14:sldIdLst>
         </p14:section>
-        <p14:section name="본문" id="{736A6AF7-4CFD-4A8C-B5E2-9238E540E690}">
+        <p14:section name="본문" id="{AC3DBD6A-6BA7-4D31-9C8C-B74DF8D102B3}">
           <p14:sldIdLst>
             <p14:sldId id="257"/>
             <p14:sldId id="258"/>
@@ -127,7 +127,7 @@
             <p14:sldId id="261"/>
           </p14:sldIdLst>
         </p14:section>
-        <p14:section name="마무리" id="{9E618381-223B-4CF1-AD4C-A580004901D6}">
+        <p14:section name="마무리" id="{836D7AFB-59FC-473A-B46F-E05DBBD50E2C}">
           <p14:sldIdLst>
             <p14:sldId id="262"/>
           </p14:sldIdLst>
@@ -1517,7 +1517,7 @@
             </a:lvl1pPr>
           </a:lstStyle>
           <a:p>
-            <a:fld id="{A6E0AA1A-1C95-4DBE-A592-3E087EC9074E}" type="slidenum">
+            <a:fld id="{ED548068-3C95-431C-8ECF-BF82911B2155}" type="slidenum">
               <a:rPr lang="en-US"/>
               <a:t>‹#›</a:t>
             </a:fld>
@@ -2575,7 +2575,7 @@
             </a:lvl1pPr>
           </a:lstStyle>
           <a:p>
-            <a:fld id="{B716CDA4-7716-44CD-8E9F-4508629EFB7C}" type="slidenum">
+            <a:fld id="{2E58EA72-BE10-4A9C-8A77-1FB4BBE8A254}" type="slidenum">
               <a:rPr lang="en-US"/>
               <a:t>‹#›</a:t>
             </a:fld>
@@ -3634,7 +3634,7 @@
             </a:lvl1pPr>
           </a:lstStyle>
           <a:p>
-            <a:fld id="{29670F0A-8C3D-4F9D-82E5-AD336B5124A0}" type="slidenum">
+            <a:fld id="{C621D9CC-A3B9-469F-9AD5-2C946ED3B383}" type="slidenum">
               <a:rPr lang="en-US"/>
               <a:t>‹#›</a:t>
             </a:fld>
@@ -5013,7 +5013,7 @@
           <a:bodyPr/>
           <a:lstStyle/>
           <a:p>
-            <a:fld id="{03AABE51-DF42-4525-9BD7-497FD1FA63A5}" type="slidenum">
+            <a:fld id="{EA80927F-F9A3-468B-8854-0D98B2D1CD5E}" type="slidenum">
               <a:rPr lang="en-US"/>
               <a:t>‹#›</a:t>
             </a:fld>
@@ -5179,7 +5179,7 @@
           <a:bodyPr/>
           <a:lstStyle/>
           <a:p>
-            <a:fld id="{9F8DA05D-DB5A-43C4-B896-636A9935FC7F}" type="slidenum">
+            <a:fld id="{5A37CA31-4C16-44E0-9A39-7817E070948E}" type="slidenum">
               <a:rPr lang="en-US"/>
               <a:t>‹#›</a:t>
             </a:fld>
@@ -5345,7 +5345,7 @@
           <a:bodyPr/>
           <a:lstStyle/>
           <a:p>
-            <a:fld id="{0BB2AE34-0504-4686-A0CC-E2A73F683E5A}" type="slidenum">
+            <a:fld id="{31E31CF3-6954-4023-9BFE-FE7C090E05BF}" type="slidenum">
               <a:rPr lang="en-US"/>
               <a:t>‹#›</a:t>
             </a:fld>
@@ -5511,7 +5511,7 @@
           <a:bodyPr/>
           <a:lstStyle/>
           <a:p>
-            <a:fld id="{77BB382F-A1B5-4D6B-B7E6-9A81E7C84B0C}" type="slidenum">
+            <a:fld id="{16E9AA70-136C-4A74-B5BD-39A8241E52C5}" type="slidenum">
               <a:rPr lang="en-US"/>
               <a:t>‹#›</a:t>
             </a:fld>
@@ -5677,7 +5677,7 @@
           <a:bodyPr/>
           <a:lstStyle/>
           <a:p>
-            <a:fld id="{88EC7D9E-7284-463D-88B6-9D5E1D4FE7E5}" type="slidenum">
+            <a:fld id="{3024F579-040B-4DD0-99EA-C40B54D01695}" type="slidenum">
               <a:rPr lang="en-US"/>
               <a:t>‹#›</a:t>
             </a:fld>
